--- a/docs/PRESENTATION.pptx
+++ b/docs/PRESENTATION.pptx
@@ -2,19 +2,19 @@
 <file path=ppt/presentation.xml><?xml version="1.0" encoding="utf-8"?>
 <p:presentation xmlns:p="http://schemas.openxmlformats.org/presentationml/2006/main">
   <p:sldMasterIdLst>
-    <p:sldMasterId xmlns:r="http://schemas.openxmlformats.org/officeDocument/2006/relationships" id="2147483648" r:id="R330cad03351a4e27"/>
+    <p:sldMasterId xmlns:r="http://schemas.openxmlformats.org/officeDocument/2006/relationships" id="2147483648" r:id="Rce36551bece44748"/>
   </p:sldMasterIdLst>
   <p:notesMasterIdLst>
-    <p:notesMasterId xmlns:r="http://schemas.openxmlformats.org/officeDocument/2006/relationships" r:id="R4f686b629bb24571"/>
+    <p:notesMasterId xmlns:r="http://schemas.openxmlformats.org/officeDocument/2006/relationships" r:id="Rc07faac1e68c4dd5"/>
   </p:notesMasterIdLst>
   <p:sldIdLst>
-    <p:sldId xmlns:r="http://schemas.openxmlformats.org/officeDocument/2006/relationships" id="256" r:id="Rebc4521942a4471e"/>
-    <p:sldId xmlns:r="http://schemas.openxmlformats.org/officeDocument/2006/relationships" id="257" r:id="Rfa1d55c585894423"/>
-    <p:sldId xmlns:r="http://schemas.openxmlformats.org/officeDocument/2006/relationships" id="258" r:id="Rfb669c00a7dd4af2"/>
-    <p:sldId xmlns:r="http://schemas.openxmlformats.org/officeDocument/2006/relationships" id="259" r:id="Ra0bde153fee34a1d"/>
-    <p:sldId xmlns:r="http://schemas.openxmlformats.org/officeDocument/2006/relationships" id="260" r:id="R9e9e0cdc0ad74550"/>
-    <p:sldId xmlns:r="http://schemas.openxmlformats.org/officeDocument/2006/relationships" id="261" r:id="R1796cd091e8b441f"/>
-    <p:sldId xmlns:r="http://schemas.openxmlformats.org/officeDocument/2006/relationships" id="262" r:id="R1d8b16cad42a4b05"/>
+    <p:sldId xmlns:r="http://schemas.openxmlformats.org/officeDocument/2006/relationships" id="256" r:id="R79b12778a2f449e5"/>
+    <p:sldId xmlns:r="http://schemas.openxmlformats.org/officeDocument/2006/relationships" id="257" r:id="R5cd5764d98b44192"/>
+    <p:sldId xmlns:r="http://schemas.openxmlformats.org/officeDocument/2006/relationships" id="258" r:id="Ra524a658cdba4f38"/>
+    <p:sldId xmlns:r="http://schemas.openxmlformats.org/officeDocument/2006/relationships" id="259" r:id="Rf5aade55fbbe4842"/>
+    <p:sldId xmlns:r="http://schemas.openxmlformats.org/officeDocument/2006/relationships" id="260" r:id="R93d7d2ef41864a8c"/>
+    <p:sldId xmlns:r="http://schemas.openxmlformats.org/officeDocument/2006/relationships" id="261" r:id="Rb2b5ff8696854559"/>
+    <p:sldId xmlns:r="http://schemas.openxmlformats.org/officeDocument/2006/relationships" id="262" r:id="Rbf0948049af142b3"/>
   </p:sldIdLst>
   <p:sldSz cx="12192000" cy="6858000"/>
   <p:notesSz cx="6858000" cy="9144000"/>
@@ -878,7 +878,7 @@
           <a:lstStyle xmlns:a="http://schemas.openxmlformats.org/drawingml/2006/main"/>
           <a:p xmlns:a="http://schemas.openxmlformats.org/drawingml/2006/main">
             <a:r>
-              <a:t>These figures are generated from the current local build. The 27-second figure is the observed robust public-candidate run; deployed p95 remains pending until the service is hosted.</a:t>
+              <a:t>These figures come from the frozen Java 21 evaluation. The 25.9-second figure is the final packaged public-candidate run (25.943 seconds measured); deployed p95 remains pending until the service is hosted.</a:t>
             </a:r>
           </a:p>
           <a:p xmlns:a="http://schemas.openxmlformats.org/drawingml/2006/main">
@@ -898,7 +898,7 @@
           </a:p>
           <a:p xmlns:a="http://schemas.openxmlformats.org/drawingml/2006/main">
             <a:r>
-              <a:t>- Local evidence: target/evaluation-receipts/summary.txt</a:t>
+              <a:t>- Local evidence: docs/evidence/evaluation-summary.json</a:t>
             </a:r>
           </a:p>
           <a:p xmlns:a="http://schemas.openxmlformats.org/drawingml/2006/main">
@@ -1066,7 +1066,7 @@
   </p:cSld>
   <p:clrMap bg1="lt1" tx1="dk1" bg2="lt2" tx2="dk2" accent1="accent1" accent2="accent2" accent3="accent3" accent4="accent4" accent5="accent5" accent6="accent6" hlink="hlink" folHlink="folHlink"/>
   <p:sldLayoutIdLst>
-    <p:sldLayoutId xmlns:r="http://schemas.openxmlformats.org/officeDocument/2006/relationships" id="2147483649" r:id="R04cdc3eb27924819"/>
+    <p:sldLayoutId xmlns:r="http://schemas.openxmlformats.org/officeDocument/2006/relationships" id="2147483649" r:id="Rd1e7e43962c84375"/>
   </p:sldLayoutIdLst>
   <p:txStyles>
     <p:titleStyle>
@@ -1721,7 +1721,18 @@
                 <a:ea typeface="Aptos"/>
                 <a:cs typeface="Aptos"/>
               </a:rPr>
-              <a:t>Codex writes the patch.
+              <a:t>AI writes the patch.</a:t>
+            </a:r>
+            <a:r>
+              <a:rPr sz="2100" b="0">
+                <a:solidFill>
+                  <a:srgbClr val="121510"/>
+                </a:solidFill>
+                <a:latin typeface="Aptos"/>
+                <a:ea typeface="Aptos"/>
+                <a:cs typeface="Aptos"/>
+              </a:rPr>
+              <a:t>
 PatchReceipt proves whether it deserves to ship.</a:t>
             </a:r>
           </a:p>
@@ -1876,6 +1887,7 @@
           <a:lstStyle xmlns:a="http://schemas.openxmlformats.org/drawingml/2006/main"/>
           <a:p xmlns:a="http://schemas.openxmlformats.org/drawingml/2006/main">
             <a:pPr algn="r">
+              <a:buNone/>
               <a:defRPr sz="1000">
                 <a:solidFill>
                   <a:srgbClr val="000000"/>
@@ -2578,6 +2590,7 @@
           <a:lstStyle xmlns:a="http://schemas.openxmlformats.org/drawingml/2006/main"/>
           <a:p xmlns:a="http://schemas.openxmlformats.org/drawingml/2006/main">
             <a:pPr algn="r">
+              <a:buNone/>
               <a:defRPr sz="1000">
                 <a:solidFill>
                   <a:srgbClr val="000000"/>
@@ -2871,7 +2884,7 @@
                 <a:ea typeface="Aptos"/>
                 <a:cs typeface="Aptos"/>
               </a:rPr>
-              <a:t>9/9 edge cases, 4/4 mutants, clean declared scope.</a:t>
+              <a:t>9/9 edge cases, 5/5 mutants, clean observed scope.</a:t>
             </a:r>
           </a:p>
         </p:txBody>
@@ -3628,6 +3641,7 @@
           <a:lstStyle xmlns:a="http://schemas.openxmlformats.org/drawingml/2006/main"/>
           <a:p xmlns:a="http://schemas.openxmlformats.org/drawingml/2006/main">
             <a:pPr algn="r">
+              <a:buNone/>
               <a:defRPr sz="1000">
                 <a:solidFill>
                   <a:srgbClr val="000000"/>
@@ -3702,7 +3716,7 @@
       </p:sp>
       <p:cxnSp>
         <p:nvCxnSpPr>
-          <p:cNvPr id="18" name="Google-Shape-2259-p159-4"/>
+          <p:cNvPr id="45" name="Google-Shape-2259-p159-4"/>
           <p:cNvCxnSpPr/>
           <p:nvPr/>
         </p:nvCxnSpPr>
@@ -4223,7 +4237,18 @@
                 <a:ea typeface="Aptos"/>
                 <a:cs typeface="Aptos"/>
               </a:rPr>
-              <a:t>Scope policy + hashes
+              <a:t>Observed scope + hashes</a:t>
+            </a:r>
+            <a:r>
+              <a:rPr sz="1500" b="0">
+                <a:solidFill>
+                  <a:srgbClr val="5B6256"/>
+                </a:solidFill>
+                <a:latin typeface="Aptos"/>
+                <a:ea typeface="Aptos"/>
+                <a:cs typeface="Aptos"/>
+              </a:rPr>
+              <a:t>
 HTML · Markdown · JSON</a:t>
             </a:r>
           </a:p>
@@ -4385,6 +4410,7 @@
           <a:lstStyle xmlns:a="http://schemas.openxmlformats.org/drawingml/2006/main"/>
           <a:p xmlns:a="http://schemas.openxmlformats.org/drawingml/2006/main">
             <a:pPr algn="r">
+              <a:buNone/>
               <a:defRPr sz="1000">
                 <a:solidFill>
                   <a:srgbClr val="000000"/>
@@ -4828,6 +4854,7 @@
           <a:lstStyle xmlns:a="http://schemas.openxmlformats.org/drawingml/2006/main"/>
           <a:p xmlns:a="http://schemas.openxmlformats.org/drawingml/2006/main">
             <a:pPr algn="ctr">
+              <a:buNone/>
               <a:defRPr sz="975" b="1">
                 <a:solidFill>
                   <a:srgbClr val="121510"/>
@@ -4989,6 +5016,7 @@
           <a:lstStyle xmlns:a="http://schemas.openxmlformats.org/drawingml/2006/main"/>
           <a:p xmlns:a="http://schemas.openxmlformats.org/drawingml/2006/main">
             <a:pPr algn="r">
+              <a:buNone/>
               <a:defRPr sz="1000">
                 <a:solidFill>
                   <a:srgbClr val="000000"/>
@@ -5170,7 +5198,7 @@
                 <a:ea typeface="Aptos"/>
                 <a:cs typeface="Aptos"/>
               </a:rPr>
-              <a:t>robust local run</a:t>
+              <a:t>final packaged run</a:t>
             </a:r>
           </a:p>
         </p:txBody>
@@ -5398,7 +5426,7 @@
                 <a:ea typeface="Aptos"/>
                 <a:cs typeface="Aptos"/>
               </a:rPr>
-              <a:t>27 s</a:t>
+              <a:t>25.9 s</a:t>
             </a:r>
           </a:p>
         </p:txBody>
@@ -5526,6 +5554,7 @@
           <a:lstStyle xmlns:a="http://schemas.openxmlformats.org/drawingml/2006/main"/>
           <a:p xmlns:a="http://schemas.openxmlformats.org/drawingml/2006/main">
             <a:pPr algn="ctr">
+              <a:buNone/>
               <a:defRPr sz="975" b="1">
                 <a:solidFill>
                   <a:srgbClr val="121510"/>

--- a/docs/PRESENTATION.pptx
+++ b/docs/PRESENTATION.pptx
@@ -2,19 +2,19 @@
 <file path=ppt/presentation.xml><?xml version="1.0" encoding="utf-8"?>
 <p:presentation xmlns:p="http://schemas.openxmlformats.org/presentationml/2006/main">
   <p:sldMasterIdLst>
-    <p:sldMasterId xmlns:r="http://schemas.openxmlformats.org/officeDocument/2006/relationships" id="2147483648" r:id="Rce36551bece44748"/>
+    <p:sldMasterId xmlns:r="http://schemas.openxmlformats.org/officeDocument/2006/relationships" id="2147483648" r:id="R75c39d5880a4486c"/>
   </p:sldMasterIdLst>
   <p:notesMasterIdLst>
-    <p:notesMasterId xmlns:r="http://schemas.openxmlformats.org/officeDocument/2006/relationships" r:id="Rc07faac1e68c4dd5"/>
+    <p:notesMasterId xmlns:r="http://schemas.openxmlformats.org/officeDocument/2006/relationships" r:id="R670115d939b44b06"/>
   </p:notesMasterIdLst>
   <p:sldIdLst>
-    <p:sldId xmlns:r="http://schemas.openxmlformats.org/officeDocument/2006/relationships" id="256" r:id="R79b12778a2f449e5"/>
-    <p:sldId xmlns:r="http://schemas.openxmlformats.org/officeDocument/2006/relationships" id="257" r:id="R5cd5764d98b44192"/>
-    <p:sldId xmlns:r="http://schemas.openxmlformats.org/officeDocument/2006/relationships" id="258" r:id="Ra524a658cdba4f38"/>
-    <p:sldId xmlns:r="http://schemas.openxmlformats.org/officeDocument/2006/relationships" id="259" r:id="Rf5aade55fbbe4842"/>
-    <p:sldId xmlns:r="http://schemas.openxmlformats.org/officeDocument/2006/relationships" id="260" r:id="R93d7d2ef41864a8c"/>
-    <p:sldId xmlns:r="http://schemas.openxmlformats.org/officeDocument/2006/relationships" id="261" r:id="Rb2b5ff8696854559"/>
-    <p:sldId xmlns:r="http://schemas.openxmlformats.org/officeDocument/2006/relationships" id="262" r:id="Rbf0948049af142b3"/>
+    <p:sldId xmlns:r="http://schemas.openxmlformats.org/officeDocument/2006/relationships" id="256" r:id="Ra8bbffb61e8f4cc5"/>
+    <p:sldId xmlns:r="http://schemas.openxmlformats.org/officeDocument/2006/relationships" id="257" r:id="R2d6fb05df4d54093"/>
+    <p:sldId xmlns:r="http://schemas.openxmlformats.org/officeDocument/2006/relationships" id="258" r:id="Rd27ed85343ca4b72"/>
+    <p:sldId xmlns:r="http://schemas.openxmlformats.org/officeDocument/2006/relationships" id="259" r:id="Rcb3fa3c6424841c5"/>
+    <p:sldId xmlns:r="http://schemas.openxmlformats.org/officeDocument/2006/relationships" id="260" r:id="R5c7d1b3573154d66"/>
+    <p:sldId xmlns:r="http://schemas.openxmlformats.org/officeDocument/2006/relationships" id="261" r:id="R29f30e794aec405d"/>
+    <p:sldId xmlns:r="http://schemas.openxmlformats.org/officeDocument/2006/relationships" id="262" r:id="R6c5a929e9f3949d9"/>
   </p:sldIdLst>
   <p:sldSz cx="12192000" cy="6858000"/>
   <p:notesSz cx="6858000" cy="9144000"/>
@@ -973,7 +973,7 @@
           <a:lstStyle xmlns:a="http://schemas.openxmlformats.org/drawingml/2006/main"/>
           <a:p xmlns:a="http://schemas.openxmlformats.org/drawingml/2006/main">
             <a:r>
-              <a:t>Close on the proposition. Codex planned, implemented, tested, debugged, evaluated, documented and prepared the deployment. Claude is used only as an independent review channel through an auditable handoff.</a:t>
+              <a:t>Close on the proposition. The user created and directed PatchReceipt, made the final product decisions, and used Codex as an engineering assistant for planning, implementation, testing, debugging, evaluation, documentation, and deployment preparation.</a:t>
             </a:r>
           </a:p>
           <a:p xmlns:a="http://schemas.openxmlformats.org/drawingml/2006/main">
@@ -989,11 +989,6 @@
           <a:p xmlns:a="http://schemas.openxmlformats.org/drawingml/2006/main">
             <a:r>
               <a:t>- Local evidence: CODEX_JOURNAL.md</a:t>
-            </a:r>
-          </a:p>
-          <a:p xmlns:a="http://schemas.openxmlformats.org/drawingml/2006/main">
-            <a:r>
-              <a:t>- Local handoff: CLAUDE_HANDOFF.md</a:t>
             </a:r>
           </a:p>
           <a:p xmlns:a="http://schemas.openxmlformats.org/drawingml/2006/main">
@@ -1066,7 +1061,7 @@
   </p:cSld>
   <p:clrMap bg1="lt1" tx1="dk1" bg2="lt2" tx2="dk2" accent1="accent1" accent2="accent2" accent3="accent3" accent4="accent4" accent5="accent5" accent6="accent6" hlink="hlink" folHlink="folHlink"/>
   <p:sldLayoutIdLst>
-    <p:sldLayoutId xmlns:r="http://schemas.openxmlformats.org/officeDocument/2006/relationships" id="2147483649" r:id="Rd1e7e43962c84375"/>
+    <p:sldLayoutId xmlns:r="http://schemas.openxmlformats.org/officeDocument/2006/relationships" id="2147483649" r:id="R3d6d060542a448d8"/>
   </p:sldLayoutIdLst>
   <p:txStyles>
     <p:titleStyle>
@@ -3716,7 +3711,7 @@
       </p:sp>
       <p:cxnSp>
         <p:nvCxnSpPr>
-          <p:cNvPr id="45" name="Google-Shape-2259-p159-4"/>
+          <p:cNvPr id="48" name="Google-Shape-2259-p159-4"/>
           <p:cNvCxnSpPr/>
           <p:nvPr/>
         </p:nvCxnSpPr>
